--- a/docs/cdnow-retention-executive-deck.pptx
+++ b/docs/cdnow-retention-executive-deck.pptx
@@ -1650,33 +1650,13 @@
       </p:sp>
       <p:sp>
         <p:nvSpPr>
-          <p:cNvPr id="5" name="Shape 3"/>
+          <p:cNvPr id="5" name="Text 3"/>
           <p:cNvSpPr/>
           <p:nvPr/>
         </p:nvSpPr>
         <p:spPr>
           <a:xfrm>
-            <a:off x="731520" y="3611880"/>
-            <a:ext cx="3108960" cy="18288"/>
-          </a:xfrm>
-          <a:prstGeom prst="rect">
-            <a:avLst/>
-          </a:prstGeom>
-          <a:solidFill>
-            <a:srgbClr val="3A4A85"/>
-          </a:solidFill>
-          <a:ln/>
-        </p:spPr>
-      </p:sp>
-      <p:sp>
-        <p:nvSpPr>
-          <p:cNvPr id="6" name="Text 4"/>
-          <p:cNvSpPr/>
-          <p:nvPr/>
-        </p:nvSpPr>
-        <p:spPr>
-          <a:xfrm>
-            <a:off x="731520" y="3886200"/>
+            <a:off x="731520" y="3794760"/>
             <a:ext cx="8229600" cy="822960"/>
           </a:xfrm>
           <a:prstGeom prst="rect">
@@ -1726,7 +1706,7 @@
       </p:sp>
       <p:sp>
         <p:nvSpPr>
-          <p:cNvPr id="7" name="Text 5"/>
+          <p:cNvPr id="6" name="Text 4"/>
           <p:cNvSpPr/>
           <p:nvPr/>
         </p:nvSpPr>
@@ -1882,11 +1862,11 @@
         <p:spPr>
           <a:xfrm>
             <a:off x="640080" y="1874520"/>
-            <a:ext cx="2514600" cy="2286000"/>
+            <a:ext cx="2514600" cy="2651760"/>
           </a:xfrm>
           <a:prstGeom prst="roundRect">
             <a:avLst>
-              <a:gd name="adj" fmla="val 4800"/>
+              <a:gd name="adj" fmla="val 4364"/>
             </a:avLst>
           </a:prstGeom>
           <a:solidFill>
@@ -1908,7 +1888,7 @@
         </p:nvSpPr>
         <p:spPr>
           <a:xfrm>
-            <a:off x="640080" y="2148840"/>
+            <a:off x="640080" y="2286000"/>
             <a:ext cx="2514600" cy="868680"/>
           </a:xfrm>
           <a:prstGeom prst="rect">
@@ -1947,7 +1927,7 @@
         </p:nvSpPr>
         <p:spPr>
           <a:xfrm>
-            <a:off x="777240" y="3063240"/>
+            <a:off x="777240" y="3291840"/>
             <a:ext cx="2240280" cy="914400"/>
           </a:xfrm>
           <a:prstGeom prst="rect">
@@ -2004,11 +1984,11 @@
         <p:spPr>
           <a:xfrm>
             <a:off x="3429000" y="1874520"/>
-            <a:ext cx="2514600" cy="2286000"/>
+            <a:ext cx="2514600" cy="2651760"/>
           </a:xfrm>
           <a:prstGeom prst="roundRect">
             <a:avLst>
-              <a:gd name="adj" fmla="val 4800"/>
+              <a:gd name="adj" fmla="val 4364"/>
             </a:avLst>
           </a:prstGeom>
           <a:solidFill>
@@ -2030,7 +2010,7 @@
         </p:nvSpPr>
         <p:spPr>
           <a:xfrm>
-            <a:off x="3429000" y="2148840"/>
+            <a:off x="3429000" y="2286000"/>
             <a:ext cx="2514600" cy="868680"/>
           </a:xfrm>
           <a:prstGeom prst="rect">
@@ -2069,7 +2049,7 @@
         </p:nvSpPr>
         <p:spPr>
           <a:xfrm>
-            <a:off x="3566160" y="3063240"/>
+            <a:off x="3566160" y="3291840"/>
             <a:ext cx="2240280" cy="914400"/>
           </a:xfrm>
           <a:prstGeom prst="rect">
@@ -2126,11 +2106,11 @@
         <p:spPr>
           <a:xfrm>
             <a:off x="6217920" y="1874520"/>
-            <a:ext cx="2514600" cy="2286000"/>
+            <a:ext cx="2514600" cy="2651760"/>
           </a:xfrm>
           <a:prstGeom prst="roundRect">
             <a:avLst>
-              <a:gd name="adj" fmla="val 4800"/>
+              <a:gd name="adj" fmla="val 4364"/>
             </a:avLst>
           </a:prstGeom>
           <a:solidFill>
@@ -2152,7 +2132,7 @@
         </p:nvSpPr>
         <p:spPr>
           <a:xfrm>
-            <a:off x="6217920" y="2148840"/>
+            <a:off x="6217920" y="2286000"/>
             <a:ext cx="2514600" cy="868680"/>
           </a:xfrm>
           <a:prstGeom prst="rect">
@@ -2191,7 +2171,7 @@
         </p:nvSpPr>
         <p:spPr>
           <a:xfrm>
-            <a:off x="6355080" y="3063240"/>
+            <a:off x="6355080" y="3291840"/>
             <a:ext cx="2240280" cy="914400"/>
           </a:xfrm>
           <a:prstGeom prst="rect">
@@ -2248,11 +2228,11 @@
         <p:spPr>
           <a:xfrm>
             <a:off x="9006840" y="1874520"/>
-            <a:ext cx="2514600" cy="2286000"/>
+            <a:ext cx="2514600" cy="2651760"/>
           </a:xfrm>
           <a:prstGeom prst="roundRect">
             <a:avLst>
-              <a:gd name="adj" fmla="val 4800"/>
+              <a:gd name="adj" fmla="val 4364"/>
             </a:avLst>
           </a:prstGeom>
           <a:solidFill>
@@ -2274,7 +2254,7 @@
         </p:nvSpPr>
         <p:spPr>
           <a:xfrm>
-            <a:off x="9006840" y="2148840"/>
+            <a:off x="9006840" y="2286000"/>
             <a:ext cx="2514600" cy="868680"/>
           </a:xfrm>
           <a:prstGeom prst="rect">
@@ -2313,7 +2293,7 @@
         </p:nvSpPr>
         <p:spPr>
           <a:xfrm>
-            <a:off x="9144000" y="3063240"/>
+            <a:off x="9144000" y="3291840"/>
             <a:ext cx="2240280" cy="914400"/>
           </a:xfrm>
           <a:prstGeom prst="rect">
@@ -2369,8 +2349,8 @@
         </p:nvSpPr>
         <p:spPr>
           <a:xfrm>
-            <a:off x="640080" y="4572000"/>
-            <a:ext cx="10881360" cy="548640"/>
+            <a:off x="640080" y="4983480"/>
+            <a:ext cx="10881360" cy="640080"/>
           </a:xfrm>
           <a:prstGeom prst="rect">
             <a:avLst/>
@@ -2914,7 +2894,7 @@
                 <a:gridCol w="1097280"/>
                 <a:gridCol w="2468880"/>
               </a:tblGrid>
-              <a:tr h="384048">
+              <a:tr h="457200">
                 <a:tc>
                   <a:txBody>
                     <a:bodyPr/>
@@ -3256,7 +3236,7 @@
                   </a:tcPr>
                 </a:tc>
               </a:tr>
-              <a:tr h="384048">
+              <a:tr h="457200">
                 <a:tc>
                   <a:txBody>
                     <a:bodyPr/>
@@ -3598,7 +3578,7 @@
                   </a:tcPr>
                 </a:tc>
               </a:tr>
-              <a:tr h="384048">
+              <a:tr h="457200">
                 <a:tc>
                   <a:txBody>
                     <a:bodyPr/>
@@ -3940,7 +3920,7 @@
                   </a:tcPr>
                 </a:tc>
               </a:tr>
-              <a:tr h="384048">
+              <a:tr h="457200">
                 <a:tc>
                   <a:txBody>
                     <a:bodyPr/>
@@ -4282,7 +4262,7 @@
                   </a:tcPr>
                 </a:tc>
               </a:tr>
-              <a:tr h="384048">
+              <a:tr h="457200">
                 <a:tc>
                   <a:txBody>
                     <a:bodyPr/>
@@ -4636,8 +4616,8 @@
         </p:nvSpPr>
         <p:spPr>
           <a:xfrm>
-            <a:off x="640080" y="5029200"/>
-            <a:ext cx="10881360" cy="548640"/>
+            <a:off x="640080" y="5440680"/>
+            <a:ext cx="10881360" cy="640080"/>
           </a:xfrm>
           <a:prstGeom prst="rect">
             <a:avLst/>
@@ -4746,12 +4726,12 @@
         </p:nvSpPr>
         <p:spPr>
           <a:xfrm>
-            <a:off x="731520" y="1691640"/>
-            <a:ext cx="3383280" cy="2148840"/>
+            <a:off x="731520" y="1783080"/>
+            <a:ext cx="3383280" cy="2286000"/>
           </a:xfrm>
           <a:prstGeom prst="roundRect">
             <a:avLst>
-              <a:gd name="adj" fmla="val 5106"/>
+              <a:gd name="adj" fmla="val 4800"/>
             </a:avLst>
           </a:prstGeom>
           <a:solidFill>
@@ -4773,7 +4753,7 @@
         </p:nvSpPr>
         <p:spPr>
           <a:xfrm>
-            <a:off x="960120" y="1920240"/>
+            <a:off x="960120" y="1965960"/>
             <a:ext cx="2926080" cy="320040"/>
           </a:xfrm>
           <a:prstGeom prst="rect">
@@ -4783,7 +4763,7 @@
           <a:ln/>
         </p:spPr>
         <p:txBody>
-          <a:bodyPr wrap="square" rtlCol="0" anchor="ctr"/>
+          <a:bodyPr wrap="square" lIns="0" tIns="0" rIns="0" bIns="0" rtlCol="0" anchor="t"/>
           <a:lstStyle/>
           <a:p>
             <a:pPr indent="0" marL="0">
@@ -4812,8 +4792,8 @@
         </p:nvSpPr>
         <p:spPr>
           <a:xfrm>
-            <a:off x="960120" y="2331720"/>
-            <a:ext cx="2926080" cy="1280160"/>
+            <a:off x="960120" y="2377440"/>
+            <a:ext cx="2926080" cy="1554480"/>
           </a:xfrm>
           <a:prstGeom prst="rect">
             <a:avLst/>
@@ -4822,7 +4802,7 @@
           <a:ln/>
         </p:spPr>
         <p:txBody>
-          <a:bodyPr wrap="square" rtlCol="0" anchor="ctr"/>
+          <a:bodyPr wrap="square" lIns="0" tIns="0" rIns="0" bIns="0" rtlCol="0" anchor="t"/>
           <a:lstStyle/>
           <a:p>
             <a:pPr indent="0" marL="0">
@@ -4837,24 +4817,7 @@
                 <a:ea typeface="Calibri" pitchFamily="34" charset="-122"/>
                 <a:cs typeface="Calibri" pitchFamily="34" charset="-120"/>
               </a:rPr>
-              <a:t>180-day repeat rate,</a:t>
-            </a:r>
-            <a:endParaRPr lang="en-US" sz="1300" dirty="0"/>
-          </a:p>
-          <a:p>
-            <a:pPr indent="0" marL="0">
-              <a:buNone/>
-            </a:pPr>
-            <a:r>
-              <a:rPr lang="en-US" sz="1300" dirty="0">
-                <a:solidFill>
-                  <a:srgbClr val="FFFFFF"/>
-                </a:solidFill>
-                <a:latin typeface="Calibri" pitchFamily="34" charset="0"/>
-                <a:ea typeface="Calibri" pitchFamily="34" charset="-122"/>
-                <a:cs typeface="Calibri" pitchFamily="34" charset="-120"/>
-              </a:rPr>
-              <a:t>treatment vs. a permanent holdout.</a:t>
+              <a:t>180-day repeat rate, treatment vs. a permanent holdout.</a:t>
             </a:r>
             <a:endParaRPr lang="en-US" sz="1300" dirty="0"/>
           </a:p>
@@ -4868,12 +4831,12 @@
         </p:nvSpPr>
         <p:spPr>
           <a:xfrm>
-            <a:off x="4434840" y="1691640"/>
-            <a:ext cx="3383280" cy="2148840"/>
+            <a:off x="4434840" y="1783080"/>
+            <a:ext cx="3383280" cy="2286000"/>
           </a:xfrm>
           <a:prstGeom prst="roundRect">
             <a:avLst>
-              <a:gd name="adj" fmla="val 5106"/>
+              <a:gd name="adj" fmla="val 4800"/>
             </a:avLst>
           </a:prstGeom>
           <a:solidFill>
@@ -4895,7 +4858,7 @@
         </p:nvSpPr>
         <p:spPr>
           <a:xfrm>
-            <a:off x="4663440" y="1920240"/>
+            <a:off x="4663440" y="1965960"/>
             <a:ext cx="2926080" cy="320040"/>
           </a:xfrm>
           <a:prstGeom prst="rect">
@@ -4905,7 +4868,7 @@
           <a:ln/>
         </p:spPr>
         <p:txBody>
-          <a:bodyPr wrap="square" rtlCol="0" anchor="ctr"/>
+          <a:bodyPr wrap="square" lIns="0" tIns="0" rIns="0" bIns="0" rtlCol="0" anchor="t"/>
           <a:lstStyle/>
           <a:p>
             <a:pPr indent="0" marL="0">
@@ -4934,8 +4897,8 @@
         </p:nvSpPr>
         <p:spPr>
           <a:xfrm>
-            <a:off x="4663440" y="2331720"/>
-            <a:ext cx="2926080" cy="1280160"/>
+            <a:off x="4663440" y="2377440"/>
+            <a:ext cx="2926080" cy="1554480"/>
           </a:xfrm>
           <a:prstGeom prst="rect">
             <a:avLst/>
@@ -4944,7 +4907,7 @@
           <a:ln/>
         </p:spPr>
         <p:txBody>
-          <a:bodyPr wrap="square" rtlCol="0" anchor="ctr"/>
+          <a:bodyPr wrap="square" lIns="0" tIns="0" rIns="0" bIns="0" rtlCol="0" anchor="t"/>
           <a:lstStyle/>
           <a:p>
             <a:pPr indent="0" marL="0">
@@ -4959,24 +4922,7 @@
                 <a:ea typeface="Calibri" pitchFamily="34" charset="-122"/>
                 <a:cs typeface="Calibri" pitchFamily="34" charset="-120"/>
               </a:rPr>
-              <a:t>Ship at ≥2pp lift (p&lt;0.05) after one</a:t>
-            </a:r>
-            <a:endParaRPr lang="en-US" sz="1300" dirty="0"/>
-          </a:p>
-          <a:p>
-            <a:pPr indent="0" marL="0">
-              <a:buNone/>
-            </a:pPr>
-            <a:r>
-              <a:rPr lang="en-US" sz="1300" dirty="0">
-                <a:solidFill>
-                  <a:srgbClr val="FFFFFF"/>
-                </a:solidFill>
-                <a:latin typeface="Calibri" pitchFamily="34" charset="0"/>
-                <a:ea typeface="Calibri" pitchFamily="34" charset="-122"/>
-                <a:cs typeface="Calibri" pitchFamily="34" charset="-120"/>
-              </a:rPr>
-              <a:t>full cohort. Kill below 1pp.</a:t>
+              <a:t>Ship at ≥2pp lift (p&lt;0.05) after one full cohort. Kill below 1pp.</a:t>
             </a:r>
             <a:endParaRPr lang="en-US" sz="1300" dirty="0"/>
           </a:p>
@@ -4990,12 +4936,12 @@
         </p:nvSpPr>
         <p:spPr>
           <a:xfrm>
-            <a:off x="8138160" y="1691640"/>
-            <a:ext cx="3383280" cy="2148840"/>
+            <a:off x="8138160" y="1783080"/>
+            <a:ext cx="3383280" cy="2286000"/>
           </a:xfrm>
           <a:prstGeom prst="roundRect">
             <a:avLst>
-              <a:gd name="adj" fmla="val 5106"/>
+              <a:gd name="adj" fmla="val 4800"/>
             </a:avLst>
           </a:prstGeom>
           <a:solidFill>
@@ -5017,7 +4963,7 @@
         </p:nvSpPr>
         <p:spPr>
           <a:xfrm>
-            <a:off x="8366760" y="1920240"/>
+            <a:off x="8366760" y="1965960"/>
             <a:ext cx="2926080" cy="320040"/>
           </a:xfrm>
           <a:prstGeom prst="rect">
@@ -5027,7 +4973,7 @@
           <a:ln/>
         </p:spPr>
         <p:txBody>
-          <a:bodyPr wrap="square" rtlCol="0" anchor="ctr"/>
+          <a:bodyPr wrap="square" lIns="0" tIns="0" rIns="0" bIns="0" rtlCol="0" anchor="t"/>
           <a:lstStyle/>
           <a:p>
             <a:pPr indent="0" marL="0">
@@ -5056,8 +5002,8 @@
         </p:nvSpPr>
         <p:spPr>
           <a:xfrm>
-            <a:off x="8366760" y="2331720"/>
-            <a:ext cx="2926080" cy="1280160"/>
+            <a:off x="8366760" y="2377440"/>
+            <a:ext cx="2926080" cy="1554480"/>
           </a:xfrm>
           <a:prstGeom prst="rect">
             <a:avLst/>
@@ -5066,7 +5012,7 @@
           <a:ln/>
         </p:spPr>
         <p:txBody>
-          <a:bodyPr wrap="square" rtlCol="0" anchor="ctr"/>
+          <a:bodyPr wrap="square" lIns="0" tIns="0" rIns="0" bIns="0" rtlCol="0" anchor="t"/>
           <a:lstStyle/>
           <a:p>
             <a:pPr indent="0" marL="0">
@@ -5081,24 +5027,7 @@
                 <a:ea typeface="Calibri" pitchFamily="34" charset="-122"/>
                 <a:cs typeface="Calibri" pitchFamily="34" charset="-120"/>
               </a:rPr>
-              <a:t>Value of the second order. A lift</a:t>
-            </a:r>
-            <a:endParaRPr lang="en-US" sz="1300" dirty="0"/>
-          </a:p>
-          <a:p>
-            <a:pPr indent="0" marL="0">
-              <a:buNone/>
-            </a:pPr>
-            <a:r>
-              <a:rPr lang="en-US" sz="1300" dirty="0">
-                <a:solidFill>
-                  <a:srgbClr val="FFFFFF"/>
-                </a:solidFill>
-                <a:latin typeface="Calibri" pitchFamily="34" charset="0"/>
-                <a:ea typeface="Calibri" pitchFamily="34" charset="-122"/>
-                <a:cs typeface="Calibri" pitchFamily="34" charset="-120"/>
-              </a:rPr>
-              <a:t>bought by discounting is not a win.</a:t>
+              <a:t>Value of the second order. A lift bought by discounting is not a win.</a:t>
             </a:r>
             <a:endParaRPr lang="en-US" sz="1300" dirty="0"/>
           </a:p>
@@ -5112,7 +5041,7 @@
         </p:nvSpPr>
         <p:spPr>
           <a:xfrm>
-            <a:off x="731520" y="4297680"/>
+            <a:off x="731520" y="4617720"/>
             <a:ext cx="9144000" cy="365760"/>
           </a:xfrm>
           <a:prstGeom prst="rect">
@@ -5151,7 +5080,7 @@
         </p:nvSpPr>
         <p:spPr>
           <a:xfrm>
-            <a:off x="731520" y="4663440"/>
+            <a:off x="731520" y="4983480"/>
             <a:ext cx="10698480" cy="822960"/>
           </a:xfrm>
           <a:prstGeom prst="rect">
@@ -5190,7 +5119,7 @@
         </p:nvSpPr>
         <p:spPr>
           <a:xfrm>
-            <a:off x="731520" y="5806440"/>
+            <a:off x="731520" y="6035040"/>
             <a:ext cx="10698480" cy="365760"/>
           </a:xfrm>
           <a:prstGeom prst="rect">
